--- a/заняття_2_python_oop/презентація/oop_python_lesson.pptx
+++ b/заняття_2_python_oop/презентація/oop_python_lesson.pptx
@@ -6480,19 +6480,10 @@
                 <a:ea typeface="Calibri" pitchFamily="34" charset="-122"/>
                 <a:cs typeface="Calibri" pitchFamily="34" charset="-120"/>
               </a:rPr>
-              <a:t>2. Написати мінімум 2 Python-класи для різних сутностей.</a:t>
-            </a:r>
-            <a:endParaRPr lang="en-US" sz="1150" dirty="0"/>
-          </a:p>
-          <a:p>
-            <a:pPr marL="0" indent="0">
-              <a:spcAft>
-                <a:spcPts val="800"/>
-              </a:spcAft>
-              <a:buNone/>
-            </a:pPr>
-            <a:r>
-              <a:rPr lang="en-US" sz="1150" dirty="0">
+              <a:t>2. Написати мінімум 2 Python-класи для різних </a:t>
+            </a:r>
+            <a:r>
+              <a:rPr lang="en-US" sz="1150" dirty="0" err="1">
                 <a:solidFill>
                   <a:srgbClr val="C8D6F5"/>
                 </a:solidFill>
@@ -6500,7 +6491,18 @@
                 <a:ea typeface="Calibri" pitchFamily="34" charset="-122"/>
                 <a:cs typeface="Calibri" pitchFamily="34" charset="-120"/>
               </a:rPr>
-              <a:t>3. У кожному класі: __init__, @property або _метод, @classmethod from_dict, __str__.</a:t>
+              <a:t>сутностей</a:t>
+            </a:r>
+            <a:r>
+              <a:rPr lang="en-US" sz="1150">
+                <a:solidFill>
+                  <a:srgbClr val="C8D6F5"/>
+                </a:solidFill>
+                <a:latin typeface="Calibri" pitchFamily="34" charset="0"/>
+                <a:ea typeface="Calibri" pitchFamily="34" charset="-122"/>
+                <a:cs typeface="Calibri" pitchFamily="34" charset="-120"/>
+              </a:rPr>
+              <a:t>.</a:t>
             </a:r>
             <a:endParaRPr lang="en-US" sz="1150" dirty="0"/>
           </a:p>
@@ -11111,7 +11113,7 @@
               <a:buNone/>
             </a:pPr>
             <a:r>
-              <a:rPr lang="en-US" sz="1300" dirty="0">
+              <a:rPr lang="en-US" sz="1300" dirty="0" err="1">
                 <a:solidFill>
                   <a:srgbClr val="1A2342"/>
                 </a:solidFill>
@@ -11119,7 +11121,128 @@
                 <a:ea typeface="Calibri" pitchFamily="34" charset="-122"/>
                 <a:cs typeface="Calibri" pitchFamily="34" charset="-120"/>
               </a:rPr>
-              <a:t>Обери одну сутність зі свого проєкту (або: Product / Order / Client / Article / Booking).</a:t>
+              <a:t>Обери</a:t>
+            </a:r>
+            <a:r>
+              <a:rPr lang="en-US" sz="1300" dirty="0">
+                <a:solidFill>
+                  <a:srgbClr val="1A2342"/>
+                </a:solidFill>
+                <a:latin typeface="Calibri" pitchFamily="34" charset="0"/>
+                <a:ea typeface="Calibri" pitchFamily="34" charset="-122"/>
+                <a:cs typeface="Calibri" pitchFamily="34" charset="-120"/>
+              </a:rPr>
+              <a:t> </a:t>
+            </a:r>
+            <a:r>
+              <a:rPr lang="en-US" sz="1300" dirty="0" err="1">
+                <a:solidFill>
+                  <a:srgbClr val="1A2342"/>
+                </a:solidFill>
+                <a:latin typeface="Calibri" pitchFamily="34" charset="0"/>
+                <a:ea typeface="Calibri" pitchFamily="34" charset="-122"/>
+                <a:cs typeface="Calibri" pitchFamily="34" charset="-120"/>
+              </a:rPr>
+              <a:t>одну</a:t>
+            </a:r>
+            <a:r>
+              <a:rPr lang="en-US" sz="1300" dirty="0">
+                <a:solidFill>
+                  <a:srgbClr val="1A2342"/>
+                </a:solidFill>
+                <a:latin typeface="Calibri" pitchFamily="34" charset="0"/>
+                <a:ea typeface="Calibri" pitchFamily="34" charset="-122"/>
+                <a:cs typeface="Calibri" pitchFamily="34" charset="-120"/>
+              </a:rPr>
+              <a:t> </a:t>
+            </a:r>
+            <a:r>
+              <a:rPr lang="en-US" sz="1300" dirty="0" err="1">
+                <a:solidFill>
+                  <a:srgbClr val="1A2342"/>
+                </a:solidFill>
+                <a:latin typeface="Calibri" pitchFamily="34" charset="0"/>
+                <a:ea typeface="Calibri" pitchFamily="34" charset="-122"/>
+                <a:cs typeface="Calibri" pitchFamily="34" charset="-120"/>
+              </a:rPr>
+              <a:t>сутність</a:t>
+            </a:r>
+            <a:r>
+              <a:rPr lang="en-US" sz="1300" dirty="0">
+                <a:solidFill>
+                  <a:srgbClr val="1A2342"/>
+                </a:solidFill>
+                <a:latin typeface="Calibri" pitchFamily="34" charset="0"/>
+                <a:ea typeface="Calibri" pitchFamily="34" charset="-122"/>
+                <a:cs typeface="Calibri" pitchFamily="34" charset="-120"/>
+              </a:rPr>
+              <a:t> </a:t>
+            </a:r>
+            <a:r>
+              <a:rPr lang="en-US" sz="1300" dirty="0" err="1">
+                <a:solidFill>
+                  <a:srgbClr val="1A2342"/>
+                </a:solidFill>
+                <a:latin typeface="Calibri" pitchFamily="34" charset="0"/>
+                <a:ea typeface="Calibri" pitchFamily="34" charset="-122"/>
+                <a:cs typeface="Calibri" pitchFamily="34" charset="-120"/>
+              </a:rPr>
+              <a:t>зі</a:t>
+            </a:r>
+            <a:r>
+              <a:rPr lang="en-US" sz="1300" dirty="0">
+                <a:solidFill>
+                  <a:srgbClr val="1A2342"/>
+                </a:solidFill>
+                <a:latin typeface="Calibri" pitchFamily="34" charset="0"/>
+                <a:ea typeface="Calibri" pitchFamily="34" charset="-122"/>
+                <a:cs typeface="Calibri" pitchFamily="34" charset="-120"/>
+              </a:rPr>
+              <a:t> </a:t>
+            </a:r>
+            <a:r>
+              <a:rPr lang="en-US" sz="1300" dirty="0" err="1">
+                <a:solidFill>
+                  <a:srgbClr val="1A2342"/>
+                </a:solidFill>
+                <a:latin typeface="Calibri" pitchFamily="34" charset="0"/>
+                <a:ea typeface="Calibri" pitchFamily="34" charset="-122"/>
+                <a:cs typeface="Calibri" pitchFamily="34" charset="-120"/>
+              </a:rPr>
+              <a:t>свого</a:t>
+            </a:r>
+            <a:r>
+              <a:rPr lang="en-US" sz="1300" dirty="0">
+                <a:solidFill>
+                  <a:srgbClr val="1A2342"/>
+                </a:solidFill>
+                <a:latin typeface="Calibri" pitchFamily="34" charset="0"/>
+                <a:ea typeface="Calibri" pitchFamily="34" charset="-122"/>
+                <a:cs typeface="Calibri" pitchFamily="34" charset="-120"/>
+              </a:rPr>
+              <a:t> проєкту (</a:t>
+            </a:r>
+            <a:r>
+              <a:rPr lang="en-US" sz="1300" dirty="0" err="1">
+                <a:solidFill>
+                  <a:srgbClr val="1A2342"/>
+                </a:solidFill>
+                <a:latin typeface="Calibri" pitchFamily="34" charset="0"/>
+                <a:ea typeface="Calibri" pitchFamily="34" charset="-122"/>
+                <a:cs typeface="Calibri" pitchFamily="34" charset="-120"/>
+              </a:rPr>
+              <a:t>або</a:t>
+            </a:r>
+            <a:r>
+              <a:rPr lang="en-US" sz="1300" dirty="0">
+                <a:solidFill>
+                  <a:srgbClr val="1A2342"/>
+                </a:solidFill>
+                <a:latin typeface="Calibri" pitchFamily="34" charset="0"/>
+                <a:ea typeface="Calibri" pitchFamily="34" charset="-122"/>
+                <a:cs typeface="Calibri" pitchFamily="34" charset="-120"/>
+              </a:rPr>
+              <a:t>: Product / Order / Client / Article / Booking).</a:t>
             </a:r>
             <a:endParaRPr lang="en-US" sz="1300" dirty="0"/>
           </a:p>

--- a/заняття_2_python_oop/презентація/oop_python_lesson.pptx
+++ b/заняття_2_python_oop/презентація/oop_python_lesson.pptx
@@ -6480,29 +6480,7 @@
                 <a:ea typeface="Calibri" pitchFamily="34" charset="-122"/>
                 <a:cs typeface="Calibri" pitchFamily="34" charset="-120"/>
               </a:rPr>
-              <a:t>2. Написати мінімум 2 Python-класи для різних </a:t>
-            </a:r>
-            <a:r>
-              <a:rPr lang="en-US" sz="1150" dirty="0" err="1">
-                <a:solidFill>
-                  <a:srgbClr val="C8D6F5"/>
-                </a:solidFill>
-                <a:latin typeface="Calibri" pitchFamily="34" charset="0"/>
-                <a:ea typeface="Calibri" pitchFamily="34" charset="-122"/>
-                <a:cs typeface="Calibri" pitchFamily="34" charset="-120"/>
-              </a:rPr>
-              <a:t>сутностей</a:t>
-            </a:r>
-            <a:r>
-              <a:rPr lang="en-US" sz="1150">
-                <a:solidFill>
-                  <a:srgbClr val="C8D6F5"/>
-                </a:solidFill>
-                <a:latin typeface="Calibri" pitchFamily="34" charset="0"/>
-                <a:ea typeface="Calibri" pitchFamily="34" charset="-122"/>
-                <a:cs typeface="Calibri" pitchFamily="34" charset="-120"/>
-              </a:rPr>
-              <a:t>.</a:t>
+              <a:t>2. Написати мінімум 2 Python-класи для різних сутностей.</a:t>
             </a:r>
             <a:endParaRPr lang="en-US" sz="1150" dirty="0"/>
           </a:p>
